--- a/exports/pptx/lessons/primary-module-02-panchabhuta/day-08-project-1.pptx
+++ b/exports/pptx/lessons/primary-module-02-panchabhuta/day-08-project-1.pptx
@@ -15,9 +15,10 @@
     <p:sldId id="263" r:id="rId9"/>
     <p:sldId id="264" r:id="rId10"/>
     <p:sldId id="265" r:id="rId11"/>
+    <p:sldId id="266" r:id="rId12"/>
   </p:sldIdLst>
   <p:notesMasterIdLst>
-    <p:notesMasterId r:id="rId12"/>
+    <p:notesMasterId r:id="rId13"/>
   </p:notesMasterIdLst>
   <p:sldSz cx="9144000" cy="5143500"/>
   <p:notesSz cx="5143500" cy="9144000"/>
@@ -623,6 +624,94 @@
             <a:fld id="{F7021451-1387-4CA6-816F-3879F97B5CBC}" type="slidenum">
               <a:rPr lang="en-US"/>
               <a:t>10</a:t>
+            </a:fld>
+            <a:endParaRPr lang="en-US"/>
+          </a:p>
+        </p:txBody>
+      </p:sp>
+    </p:spTree>
+    <p:extLst>
+      <p:ext uri="{BB962C8B-B14F-4D97-AF65-F5344CB8AC3E}">
+        <p14:creationId xmlns:p14="http://schemas.microsoft.com/office/powerpoint/2010/main" val="1024086991"/>
+      </p:ext>
+    </p:extLst>
+  </p:cSld>
+  <p:clrMapOvr>
+    <a:masterClrMapping/>
+  </p:clrMapOvr>
+</p:notes>
+</file>
+
+<file path=ppt/notesSlides/notesSlide11.xml><?xml version="1.0" encoding="utf-8"?>
+<p:notes xmlns:a="http://schemas.openxmlformats.org/drawingml/2006/main" xmlns:r="http://schemas.openxmlformats.org/officeDocument/2006/relationships" xmlns:p="http://schemas.openxmlformats.org/presentationml/2006/main">
+  <p:cSld>
+    <p:spTree>
+      <p:nvGrpSpPr>
+        <p:cNvPr id="1" name=""/>
+        <p:cNvGrpSpPr/>
+        <p:nvPr/>
+      </p:nvGrpSpPr>
+      <p:grpSpPr>
+        <a:xfrm>
+          <a:off x="0" y="0"/>
+          <a:ext cx="0" cy="0"/>
+          <a:chOff x="0" y="0"/>
+          <a:chExt cx="0" cy="0"/>
+        </a:xfrm>
+      </p:grpSpPr>
+      <p:sp>
+        <p:nvSpPr>
+          <p:cNvPr id="2" name="Slide Image Placeholder 1"/>
+          <p:cNvSpPr>
+            <a:spLocks noGrp="1" noRot="1" noChangeAspect="1"/>
+          </p:cNvSpPr>
+          <p:nvPr>
+            <p:ph type="sldImg"/>
+          </p:nvPr>
+        </p:nvSpPr>
+        <p:spPr/>
+      </p:sp>
+      <p:sp>
+        <p:nvSpPr>
+          <p:cNvPr id="3" name="Notes Placeholder 2"/>
+          <p:cNvSpPr>
+            <a:spLocks noGrp="1"/>
+          </p:cNvSpPr>
+          <p:nvPr>
+            <p:ph type="body" idx="1"/>
+          </p:nvPr>
+        </p:nvSpPr>
+        <p:spPr/>
+        <p:txBody>
+          <a:bodyPr/>
+          <a:lstStyle/>
+          <a:p>
+            <a:r>
+              <a:rPr lang="en-US" dirty="0"/>
+              <a:t/>
+            </a:r>
+            <a:endParaRPr lang="en-US" dirty="0"/>
+          </a:p>
+        </p:txBody>
+      </p:sp>
+      <p:sp>
+        <p:nvSpPr>
+          <p:cNvPr id="4" name="Slide Number Placeholder 3"/>
+          <p:cNvSpPr>
+            <a:spLocks noGrp="1"/>
+          </p:cNvSpPr>
+          <p:nvPr>
+            <p:ph type="sldNum" sz="quarter" idx="10"/>
+          </p:nvPr>
+        </p:nvSpPr>
+        <p:spPr/>
+        <p:txBody>
+          <a:bodyPr/>
+          <a:lstStyle/>
+          <a:p>
+            <a:fld id="{F7021451-1387-4CA6-816F-3879F97B5CBC}" type="slidenum">
+              <a:rPr lang="en-US"/>
+              <a:t>11</a:t>
             </a:fld>
             <a:endParaRPr lang="en-US"/>
           </a:p>
@@ -1876,102 +1965,6 @@
         </p:nvSpPr>
         <p:spPr>
           <a:xfrm>
-            <a:off x="406301" y="1223963"/>
-            <a:ext cx="8498026" cy="274290"/>
-          </a:xfrm>
-          <a:prstGeom prst="rect">
-            <a:avLst/>
-          </a:prstGeom>
-          <a:noFill/>
-          <a:ln/>
-        </p:spPr>
-        <p:txBody>
-          <a:bodyPr wrap="square" lIns="0" tIns="0" rIns="0" bIns="0" rtlCol="0" anchor="t"/>
-          <a:lstStyle/>
-          <a:p>
-            <a:pPr algn="l" indent="0" marL="0">
-              <a:lnSpc>
-                <a:spcPts val="2160"/>
-              </a:lnSpc>
-              <a:spcBef>
-                <a:spcPts val="600"/>
-              </a:spcBef>
-              <a:spcAft>
-                <a:spcPts val="800"/>
-              </a:spcAft>
-              <a:buNone/>
-            </a:pPr>
-            <a:r>
-              <a:rPr lang="en-US" sz="1800" b="1" dirty="0">
-                <a:solidFill>
-                  <a:srgbClr val="E07A5F"/>
-                </a:solidFill>
-                <a:latin typeface="Georgia" pitchFamily="34" charset="0"/>
-                <a:ea typeface="Georgia" pitchFamily="34" charset="-122"/>
-                <a:cs typeface="Georgia" pitchFamily="34" charset="-120"/>
-              </a:rPr>
-              <a:t>Goal</a:t>
-            </a:r>
-            <a:endParaRPr lang="en-US" sz="1800" dirty="0"/>
-          </a:p>
-        </p:txBody>
-      </p:sp>
-      <p:sp>
-        <p:nvSpPr>
-          <p:cNvPr id="6" name="Text 4"/>
-          <p:cNvSpPr/>
-          <p:nvPr/>
-        </p:nvSpPr>
-        <p:spPr>
-          <a:xfrm>
-            <a:off x="406301" y="1637854"/>
-            <a:ext cx="8498026" cy="213271"/>
-          </a:xfrm>
-          <a:prstGeom prst="rect">
-            <a:avLst/>
-          </a:prstGeom>
-          <a:noFill/>
-          <a:ln/>
-        </p:spPr>
-        <p:txBody>
-          <a:bodyPr wrap="square" lIns="0" tIns="0" rIns="0" bIns="0" rtlCol="0" anchor="t"/>
-          <a:lstStyle/>
-          <a:p>
-            <a:pPr algn="l" indent="0" marL="0">
-              <a:lnSpc>
-                <a:spcPts val="1680"/>
-              </a:lnSpc>
-              <a:spcBef>
-                <a:spcPts val="300"/>
-              </a:spcBef>
-              <a:spcAft>
-                <a:spcPts val="300"/>
-              </a:spcAft>
-              <a:buNone/>
-            </a:pPr>
-            <a:r>
-              <a:rPr lang="en-US" sz="1200" dirty="0">
-                <a:solidFill>
-                  <a:srgbClr val="2C2C2C"/>
-                </a:solidFill>
-                <a:latin typeface="Verdana" pitchFamily="34" charset="0"/>
-                <a:ea typeface="Verdana" pitchFamily="34" charset="-122"/>
-                <a:cs typeface="Verdana" pitchFamily="34" charset="-120"/>
-              </a:rPr>
-              <a:t>Each child picks ONE element and starts a project (drawing, 3D model, or story).</a:t>
-            </a:r>
-            <a:endParaRPr lang="en-US" sz="1200" dirty="0"/>
-          </a:p>
-        </p:txBody>
-      </p:sp>
-      <p:sp>
-        <p:nvSpPr>
-          <p:cNvPr id="7" name="Text 5"/>
-          <p:cNvSpPr/>
-          <p:nvPr/>
-        </p:nvSpPr>
-        <p:spPr>
-          <a:xfrm>
             <a:off x="406301" y="4434929"/>
             <a:ext cx="8498026" cy="213271"/>
           </a:xfrm>
@@ -2116,7 +2109,7 @@
                 <a:ea typeface="Georgia" pitchFamily="34" charset="-122"/>
                 <a:cs typeface="Georgia" pitchFamily="34" charset="-120"/>
               </a:rPr>
-              <a:t>Teacher's quick notes</a:t>
+              <a:t>Differentiation</a:t>
             </a:r>
             <a:endParaRPr lang="en-US" sz="1800" dirty="0"/>
           </a:p>
@@ -2130,8 +2123,8 @@
         </p:nvSpPr>
         <p:spPr>
           <a:xfrm>
-            <a:off x="406301" y="870942"/>
-            <a:ext cx="8498026" cy="426541"/>
+            <a:off x="634901" y="883593"/>
+            <a:ext cx="8102798" cy="525661"/>
           </a:xfrm>
           <a:prstGeom prst="rect">
             <a:avLst/>
@@ -2143,20 +2136,18 @@
           <a:bodyPr wrap="square" lIns="0" tIns="0" rIns="0" bIns="0" rtlCol="0" anchor="t"/>
           <a:lstStyle/>
           <a:p>
-            <a:pPr algn="l" indent="0" marL="0">
-              <a:lnSpc>
-                <a:spcPts val="1680"/>
-              </a:lnSpc>
-              <a:spcBef>
-                <a:spcPts val="300"/>
-              </a:spcBef>
-              <a:spcAft>
-                <a:spcPts val="300"/>
-              </a:spcAft>
-              <a:buNone/>
-            </a:pPr>
-            <a:r>
-              <a:rPr lang="en-US" sz="1200" dirty="0">
+            <a:pPr algn="l" marL="342900" indent="-342900">
+              <a:lnSpc>
+                <a:spcPts val="1620"/>
+              </a:lnSpc>
+              <a:spcAft>
+                <a:spcPts val="300"/>
+              </a:spcAft>
+              <a:buSzPct val="100000"/>
+              <a:buChar char="•"/>
+            </a:pPr>
+            <a:r>
+              <a:rPr lang="en-US" sz="1200" b="1" dirty="0">
                 <a:solidFill>
                   <a:srgbClr val="2C2C2C"/>
                 </a:solidFill>
@@ -2164,22 +2155,19 @@
                 <a:ea typeface="Verdana" pitchFamily="34" charset="-122"/>
                 <a:cs typeface="Verdana" pitchFamily="34" charset="-120"/>
               </a:rPr>
-              <a:t>– Some children will get stuck on "what to draw." Offer a one-sentence prompt: </a:t>
+              <a:t>Tier up:</a:t>
             </a:r>
             <a:pPr algn="l" indent="0" marL="0">
               <a:lnSpc>
-                <a:spcPts val="1680"/>
-              </a:lnSpc>
-              <a:spcBef>
-                <a:spcPts val="300"/>
-              </a:spcBef>
+                <a:spcPts val="1620"/>
+              </a:lnSpc>
               <a:spcAft>
                 <a:spcPts val="300"/>
               </a:spcAft>
               <a:buNone/>
             </a:pPr>
             <a:r>
-              <a:rPr lang="en-US" sz="1200" i="1" dirty="0">
+              <a:rPr lang="en-US" sz="1200" dirty="0">
                 <a:solidFill>
                   <a:srgbClr val="2C2C2C"/>
                 </a:solidFill>
@@ -2187,22 +2175,23 @@
                 <a:ea typeface="Verdana" pitchFamily="34" charset="-122"/>
                 <a:cs typeface="Verdana" pitchFamily="34" charset="-120"/>
               </a:rPr>
-              <a:t>"Draw your favourite Pṛthvī thing at home."</a:t>
-            </a:r>
-            <a:pPr algn="l" indent="0" marL="0">
-              <a:lnSpc>
-                <a:spcPts val="1680"/>
-              </a:lnSpc>
-              <a:spcBef>
-                <a:spcPts val="300"/>
-              </a:spcBef>
-              <a:spcAft>
-                <a:spcPts val="300"/>
-              </a:spcAft>
-              <a:buNone/>
-            </a:pPr>
-            <a:r>
-              <a:rPr lang="en-US" sz="1200" dirty="0">
+              <a:t> Show two elements interacting (rain falling on soil = Ap + Pṛthvī).</a:t>
+            </a:r>
+            <a:endParaRPr lang="en-US" sz="1200" dirty="0"/>
+          </a:p>
+          <a:p>
+            <a:pPr algn="l" marL="342900" indent="-342900">
+              <a:lnSpc>
+                <a:spcPts val="1620"/>
+              </a:lnSpc>
+              <a:spcAft>
+                <a:spcPts val="300"/>
+              </a:spcAft>
+              <a:buSzPct val="100000"/>
+              <a:buChar char="•"/>
+            </a:pPr>
+            <a:r>
+              <a:rPr lang="en-US" sz="1200" b="1" dirty="0">
                 <a:solidFill>
                   <a:srgbClr val="2C2C2C"/>
                 </a:solidFill>
@@ -2210,7 +2199,275 @@
                 <a:ea typeface="Verdana" pitchFamily="34" charset="-122"/>
                 <a:cs typeface="Verdana" pitchFamily="34" charset="-120"/>
               </a:rPr>
-              <a:t> – Watch for materials disputes — keep clay and glue stations supervised.</a:t>
+              <a:t>Tier down:</a:t>
+            </a:r>
+            <a:pPr algn="l" indent="0" marL="0">
+              <a:lnSpc>
+                <a:spcPts val="1620"/>
+              </a:lnSpc>
+              <a:spcAft>
+                <a:spcPts val="300"/>
+              </a:spcAft>
+              <a:buNone/>
+            </a:pPr>
+            <a:r>
+              <a:rPr lang="en-US" sz="1200" dirty="0">
+                <a:solidFill>
+                  <a:srgbClr val="2C2C2C"/>
+                </a:solidFill>
+                <a:latin typeface="Verdana" pitchFamily="34" charset="0"/>
+                <a:ea typeface="Verdana" pitchFamily="34" charset="-122"/>
+                <a:cs typeface="Verdana" pitchFamily="34" charset="-120"/>
+              </a:rPr>
+              <a:t> Drawing is the easiest format. Just pick one element and one picture.</a:t>
+            </a:r>
+            <a:endParaRPr lang="en-US" sz="1200" dirty="0"/>
+          </a:p>
+        </p:txBody>
+      </p:sp>
+      <p:sp>
+        <p:nvSpPr>
+          <p:cNvPr id="5" name="Text 3"/>
+          <p:cNvSpPr/>
+          <p:nvPr/>
+        </p:nvSpPr>
+        <p:spPr>
+          <a:xfrm>
+            <a:off x="406301" y="4434929"/>
+            <a:ext cx="8498026" cy="213271"/>
+          </a:xfrm>
+          <a:prstGeom prst="rect">
+            <a:avLst/>
+          </a:prstGeom>
+          <a:noFill/>
+          <a:ln/>
+        </p:spPr>
+        <p:txBody>
+          <a:bodyPr wrap="square" lIns="0" tIns="0" rIns="0" bIns="0" rtlCol="0" anchor="t"/>
+          <a:lstStyle/>
+          <a:p>
+            <a:pPr algn="l" indent="0" marL="0">
+              <a:lnSpc>
+                <a:spcPts val="1680"/>
+              </a:lnSpc>
+              <a:spcBef>
+                <a:spcPts val="300"/>
+              </a:spcBef>
+              <a:spcAft>
+                <a:spcPts val="300"/>
+              </a:spcAft>
+              <a:buNone/>
+            </a:pPr>
+            <a:r>
+              <a:rPr lang="en-US" sz="1200" dirty="0">
+                <a:solidFill>
+                  <a:srgbClr val="2C2C2C"/>
+                </a:solidFill>
+                <a:latin typeface="Verdana" pitchFamily="34" charset="0"/>
+                <a:ea typeface="Verdana" pitchFamily="34" charset="-122"/>
+                <a:cs typeface="Verdana" pitchFamily="34" charset="-120"/>
+              </a:rPr>
+              <a:t>Primary ·  · IKS Curriculum</a:t>
+            </a:r>
+            <a:endParaRPr lang="en-US" sz="1200" dirty="0"/>
+          </a:p>
+        </p:txBody>
+      </p:sp>
+    </p:spTree>
+  </p:cSld>
+  <p:clrMapOvr>
+    <a:masterClrMapping/>
+  </p:clrMapOvr>
+</p:sld>
+</file>
+
+<file path=ppt/slides/slide11.xml><?xml version="1.0" encoding="utf-8"?>
+<p:sld xmlns:a="http://schemas.openxmlformats.org/drawingml/2006/main" xmlns:r="http://schemas.openxmlformats.org/officeDocument/2006/relationships" xmlns:p="http://schemas.openxmlformats.org/presentationml/2006/main">
+  <p:cSld name="Slide 11">
+    <p:bg>
+      <p:bgPr>
+        <a:solidFill>
+          <a:srgbClr val="FAF7F2"/>
+        </a:solidFill>
+      </p:bgPr>
+    </p:bg>
+    <p:spTree>
+      <p:nvGrpSpPr>
+        <p:cNvPr id="1" name=""/>
+        <p:cNvGrpSpPr/>
+        <p:nvPr/>
+      </p:nvGrpSpPr>
+      <p:grpSpPr>
+        <a:xfrm>
+          <a:off x="0" y="0"/>
+          <a:ext cx="0" cy="0"/>
+          <a:chOff x="0" y="0"/>
+          <a:chExt cx="0" cy="0"/>
+        </a:xfrm>
+      </p:grpSpPr>
+      <p:sp>
+        <p:nvSpPr>
+          <p:cNvPr id="2" name="Text 0"/>
+          <p:cNvSpPr/>
+          <p:nvPr/>
+        </p:nvSpPr>
+        <p:spPr>
+          <a:xfrm>
+            <a:off x="0" y="0"/>
+            <a:ext cx="9144000" cy="101501"/>
+          </a:xfrm>
+          <a:prstGeom prst="rect">
+            <a:avLst/>
+          </a:prstGeom>
+          <a:solidFill>
+            <a:srgbClr val="87A96B"/>
+          </a:solidFill>
+          <a:ln/>
+        </p:spPr>
+        <p:txBody>
+          <a:bodyPr wrap="square" rtlCol="0" anchor="ctr"/>
+          <a:lstStyle/>
+          <a:p>
+            <a:pPr indent="0" marL="0">
+              <a:buNone/>
+            </a:pPr>
+            <a:endParaRPr lang="en-US" dirty="0"/>
+          </a:p>
+        </p:txBody>
+      </p:sp>
+      <p:sp>
+        <p:nvSpPr>
+          <p:cNvPr id="3" name="Text 1"/>
+          <p:cNvSpPr/>
+          <p:nvPr/>
+        </p:nvSpPr>
+        <p:spPr>
+          <a:xfrm>
+            <a:off x="406301" y="457051"/>
+            <a:ext cx="8498026" cy="274290"/>
+          </a:xfrm>
+          <a:prstGeom prst="rect">
+            <a:avLst/>
+          </a:prstGeom>
+          <a:noFill/>
+          <a:ln/>
+        </p:spPr>
+        <p:txBody>
+          <a:bodyPr wrap="square" lIns="0" tIns="0" rIns="0" bIns="0" rtlCol="0" anchor="t"/>
+          <a:lstStyle/>
+          <a:p>
+            <a:pPr algn="l" indent="0" marL="0">
+              <a:lnSpc>
+                <a:spcPts val="2160"/>
+              </a:lnSpc>
+              <a:spcBef>
+                <a:spcPts val="600"/>
+              </a:spcBef>
+              <a:spcAft>
+                <a:spcPts val="800"/>
+              </a:spcAft>
+              <a:buNone/>
+            </a:pPr>
+            <a:r>
+              <a:rPr lang="en-US" sz="1800" b="1" dirty="0">
+                <a:solidFill>
+                  <a:srgbClr val="E07A5F"/>
+                </a:solidFill>
+                <a:latin typeface="Georgia" pitchFamily="34" charset="0"/>
+                <a:ea typeface="Georgia" pitchFamily="34" charset="-122"/>
+                <a:cs typeface="Georgia" pitchFamily="34" charset="-120"/>
+              </a:rPr>
+              <a:t>Teacher's quick notes</a:t>
+            </a:r>
+            <a:endParaRPr lang="en-US" sz="1800" dirty="0"/>
+          </a:p>
+        </p:txBody>
+      </p:sp>
+      <p:sp>
+        <p:nvSpPr>
+          <p:cNvPr id="4" name="Text 2"/>
+          <p:cNvSpPr/>
+          <p:nvPr/>
+        </p:nvSpPr>
+        <p:spPr>
+          <a:xfrm>
+            <a:off x="634901" y="883593"/>
+            <a:ext cx="8102798" cy="731341"/>
+          </a:xfrm>
+          <a:prstGeom prst="rect">
+            <a:avLst/>
+          </a:prstGeom>
+          <a:noFill/>
+          <a:ln/>
+        </p:spPr>
+        <p:txBody>
+          <a:bodyPr wrap="square" lIns="0" tIns="0" rIns="0" bIns="0" rtlCol="0" anchor="t"/>
+          <a:lstStyle/>
+          <a:p>
+            <a:pPr algn="l" marL="342900" indent="-342900">
+              <a:lnSpc>
+                <a:spcPts val="1620"/>
+              </a:lnSpc>
+              <a:spcAft>
+                <a:spcPts val="300"/>
+              </a:spcAft>
+              <a:buSzPct val="100000"/>
+              <a:buChar char="•"/>
+            </a:pPr>
+            <a:r>
+              <a:rPr lang="en-US" sz="1200" dirty="0">
+                <a:solidFill>
+                  <a:srgbClr val="2C2C2C"/>
+                </a:solidFill>
+                <a:latin typeface="Verdana" pitchFamily="34" charset="0"/>
+                <a:ea typeface="Verdana" pitchFamily="34" charset="-122"/>
+                <a:cs typeface="Verdana" pitchFamily="34" charset="-120"/>
+              </a:rPr>
+              <a:t>Some children will get stuck on "what to draw." Offer a one-sentence prompt: </a:t>
+            </a:r>
+            <a:pPr algn="l" indent="0" marL="0">
+              <a:lnSpc>
+                <a:spcPts val="1620"/>
+              </a:lnSpc>
+              <a:spcAft>
+                <a:spcPts val="300"/>
+              </a:spcAft>
+              <a:buNone/>
+            </a:pPr>
+            <a:r>
+              <a:rPr lang="en-US" sz="1200" i="1" dirty="0">
+                <a:solidFill>
+                  <a:srgbClr val="2C2C2C"/>
+                </a:solidFill>
+                <a:latin typeface="Verdana" pitchFamily="34" charset="0"/>
+                <a:ea typeface="Verdana" pitchFamily="34" charset="-122"/>
+                <a:cs typeface="Verdana" pitchFamily="34" charset="-120"/>
+              </a:rPr>
+              <a:t>"Draw your favourite Pṛthvī thing at home."</a:t>
+            </a:r>
+            <a:endParaRPr lang="en-US" sz="1200" dirty="0"/>
+          </a:p>
+          <a:p>
+            <a:pPr algn="l" marL="342900" indent="-342900">
+              <a:lnSpc>
+                <a:spcPts val="1620"/>
+              </a:lnSpc>
+              <a:spcAft>
+                <a:spcPts val="300"/>
+              </a:spcAft>
+              <a:buSzPct val="100000"/>
+              <a:buChar char="•"/>
+            </a:pPr>
+            <a:r>
+              <a:rPr lang="en-US" sz="1200" dirty="0">
+                <a:solidFill>
+                  <a:srgbClr val="2C2C2C"/>
+                </a:solidFill>
+                <a:latin typeface="Verdana" pitchFamily="34" charset="0"/>
+                <a:ea typeface="Verdana" pitchFamily="34" charset="-122"/>
+                <a:cs typeface="Verdana" pitchFamily="34" charset="-120"/>
+              </a:rPr>
+              <a:t>Watch for materials disputes — keep clay and glue stations supervised.</a:t>
             </a:r>
             <a:endParaRPr lang="en-US" sz="1200" dirty="0"/>
           </a:p>
@@ -2368,7 +2625,7 @@
                 <a:ea typeface="Georgia" pitchFamily="34" charset="-122"/>
                 <a:cs typeface="Georgia" pitchFamily="34" charset="-120"/>
               </a:rPr>
-              <a:t>Materials</a:t>
+              <a:t>Goal</a:t>
             </a:r>
             <a:endParaRPr lang="en-US" sz="1800" dirty="0"/>
           </a:p>
@@ -2383,7 +2640,7 @@
         <p:spPr>
           <a:xfrm>
             <a:off x="406301" y="870942"/>
-            <a:ext cx="8498026" cy="426541"/>
+            <a:ext cx="8498026" cy="213271"/>
           </a:xfrm>
           <a:prstGeom prst="rect">
             <a:avLst/>
@@ -2416,7 +2673,7 @@
                 <a:ea typeface="Verdana" pitchFamily="34" charset="-122"/>
                 <a:cs typeface="Verdana" pitchFamily="34" charset="-120"/>
               </a:rPr>
-              <a:t>– Drawing paper, crayons, scissors, glue, recycled materials (newspaper, cardboard, fabric scraps) – Clay or play-dough for 3D models – Audio recorder (optional) for story-tellers</a:t>
+              <a:t>Each child picks ONE element and starts a project (drawing, 3D model, or story).</a:t>
             </a:r>
             <a:endParaRPr lang="en-US" sz="1200" dirty="0"/>
           </a:p>
@@ -2574,7 +2831,7 @@
                 <a:ea typeface="Georgia" pitchFamily="34" charset="-122"/>
                 <a:cs typeface="Georgia" pitchFamily="34" charset="-120"/>
               </a:rPr>
-              <a:t>The flow</a:t>
+              <a:t>Materials</a:t>
             </a:r>
             <a:endParaRPr lang="en-US" sz="1800" dirty="0"/>
           </a:p>
@@ -2583,6 +2840,100 @@
       <p:sp>
         <p:nvSpPr>
           <p:cNvPr id="4" name="Text 2"/>
+          <p:cNvSpPr/>
+          <p:nvPr/>
+        </p:nvSpPr>
+        <p:spPr>
+          <a:xfrm>
+            <a:off x="634901" y="883593"/>
+            <a:ext cx="8102798" cy="769441"/>
+          </a:xfrm>
+          <a:prstGeom prst="rect">
+            <a:avLst/>
+          </a:prstGeom>
+          <a:noFill/>
+          <a:ln/>
+        </p:spPr>
+        <p:txBody>
+          <a:bodyPr wrap="square" lIns="0" tIns="0" rIns="0" bIns="0" rtlCol="0" anchor="t"/>
+          <a:lstStyle/>
+          <a:p>
+            <a:pPr algn="l" marL="342900" indent="-342900">
+              <a:lnSpc>
+                <a:spcPts val="1620"/>
+              </a:lnSpc>
+              <a:spcAft>
+                <a:spcPts val="300"/>
+              </a:spcAft>
+              <a:buSzPct val="100000"/>
+              <a:buChar char="•"/>
+            </a:pPr>
+            <a:r>
+              <a:rPr lang="en-US" sz="1200" dirty="0">
+                <a:solidFill>
+                  <a:srgbClr val="2C2C2C"/>
+                </a:solidFill>
+                <a:latin typeface="Verdana" pitchFamily="34" charset="0"/>
+                <a:ea typeface="Verdana" pitchFamily="34" charset="-122"/>
+                <a:cs typeface="Verdana" pitchFamily="34" charset="-120"/>
+              </a:rPr>
+              <a:t>Drawing paper, crayons, scissors, glue, recycled materials (newspaper, cardboard, fabric scraps)</a:t>
+            </a:r>
+            <a:endParaRPr lang="en-US" sz="1200" dirty="0"/>
+          </a:p>
+          <a:p>
+            <a:pPr algn="l" marL="342900" indent="-342900">
+              <a:lnSpc>
+                <a:spcPts val="1620"/>
+              </a:lnSpc>
+              <a:spcAft>
+                <a:spcPts val="300"/>
+              </a:spcAft>
+              <a:buSzPct val="100000"/>
+              <a:buChar char="•"/>
+            </a:pPr>
+            <a:r>
+              <a:rPr lang="en-US" sz="1200" dirty="0">
+                <a:solidFill>
+                  <a:srgbClr val="2C2C2C"/>
+                </a:solidFill>
+                <a:latin typeface="Verdana" pitchFamily="34" charset="0"/>
+                <a:ea typeface="Verdana" pitchFamily="34" charset="-122"/>
+                <a:cs typeface="Verdana" pitchFamily="34" charset="-120"/>
+              </a:rPr>
+              <a:t>Clay or play-dough for 3D models</a:t>
+            </a:r>
+            <a:endParaRPr lang="en-US" sz="1200" dirty="0"/>
+          </a:p>
+          <a:p>
+            <a:pPr algn="l" marL="342900" indent="-342900">
+              <a:lnSpc>
+                <a:spcPts val="1620"/>
+              </a:lnSpc>
+              <a:spcAft>
+                <a:spcPts val="300"/>
+              </a:spcAft>
+              <a:buSzPct val="100000"/>
+              <a:buChar char="•"/>
+            </a:pPr>
+            <a:r>
+              <a:rPr lang="en-US" sz="1200" dirty="0">
+                <a:solidFill>
+                  <a:srgbClr val="2C2C2C"/>
+                </a:solidFill>
+                <a:latin typeface="Verdana" pitchFamily="34" charset="0"/>
+                <a:ea typeface="Verdana" pitchFamily="34" charset="-122"/>
+                <a:cs typeface="Verdana" pitchFamily="34" charset="-120"/>
+              </a:rPr>
+              <a:t>Audio recorder (optional) for story-tellers</a:t>
+            </a:r>
+            <a:endParaRPr lang="en-US" sz="1200" dirty="0"/>
+          </a:p>
+        </p:txBody>
+      </p:sp>
+      <p:sp>
+        <p:nvSpPr>
+          <p:cNvPr id="5" name="Text 3"/>
           <p:cNvSpPr/>
           <p:nvPr/>
         </p:nvSpPr>
@@ -2732,7 +3083,7 @@
                 <a:ea typeface="Georgia" pitchFamily="34" charset="-122"/>
                 <a:cs typeface="Georgia" pitchFamily="34" charset="-120"/>
               </a:rPr>
-              <a:t>Settle + chant + song (5 min)</a:t>
+              <a:t>The flow</a:t>
             </a:r>
             <a:endParaRPr lang="en-US" sz="1800" dirty="0"/>
           </a:p>
@@ -2890,7 +3241,7 @@
                 <a:ea typeface="Georgia" pitchFamily="34" charset="-122"/>
                 <a:cs typeface="Georgia" pitchFamily="34" charset="-120"/>
               </a:rPr>
-              <a:t>Project choice (5 min)</a:t>
+              <a:t>Settle + chant + song (5 min)</a:t>
             </a:r>
             <a:endParaRPr lang="en-US" sz="1800" dirty="0"/>
           </a:p>
@@ -2899,240 +3250,6 @@
       <p:sp>
         <p:nvSpPr>
           <p:cNvPr id="4" name="Text 2"/>
-          <p:cNvSpPr/>
-          <p:nvPr/>
-        </p:nvSpPr>
-        <p:spPr>
-          <a:xfrm>
-            <a:off x="406301" y="870942"/>
-            <a:ext cx="8498026" cy="639812"/>
-          </a:xfrm>
-          <a:prstGeom prst="rect">
-            <a:avLst/>
-          </a:prstGeom>
-          <a:noFill/>
-          <a:ln/>
-        </p:spPr>
-        <p:txBody>
-          <a:bodyPr wrap="square" lIns="0" tIns="0" rIns="0" bIns="0" rtlCol="0" anchor="t"/>
-          <a:lstStyle/>
-          <a:p>
-            <a:pPr algn="l" indent="0" marL="0">
-              <a:lnSpc>
-                <a:spcPts val="1680"/>
-              </a:lnSpc>
-              <a:spcBef>
-                <a:spcPts val="300"/>
-              </a:spcBef>
-              <a:spcAft>
-                <a:spcPts val="300"/>
-              </a:spcAft>
-              <a:buNone/>
-            </a:pPr>
-            <a:r>
-              <a:rPr lang="en-US" sz="1200" dirty="0">
-                <a:solidFill>
-                  <a:srgbClr val="2C2C2C"/>
-                </a:solidFill>
-                <a:latin typeface="Verdana" pitchFamily="34" charset="0"/>
-                <a:ea typeface="Verdana" pitchFamily="34" charset="-122"/>
-                <a:cs typeface="Verdana" pitchFamily="34" charset="-120"/>
-              </a:rPr>
-              <a:t>– Each child picks ONE element. – Each child picks ONE format: - </a:t>
-            </a:r>
-            <a:pPr algn="l" indent="0" marL="0">
-              <a:lnSpc>
-                <a:spcPts val="1680"/>
-              </a:lnSpc>
-              <a:spcBef>
-                <a:spcPts val="300"/>
-              </a:spcBef>
-              <a:spcAft>
-                <a:spcPts val="300"/>
-              </a:spcAft>
-              <a:buNone/>
-            </a:pPr>
-            <a:r>
-              <a:rPr lang="en-US" sz="1200" b="1" dirty="0">
-                <a:solidFill>
-                  <a:srgbClr val="2C2C2C"/>
-                </a:solidFill>
-                <a:latin typeface="Verdana" pitchFamily="34" charset="0"/>
-                <a:ea typeface="Verdana" pitchFamily="34" charset="-122"/>
-                <a:cs typeface="Verdana" pitchFamily="34" charset="-120"/>
-              </a:rPr>
-              <a:t>Drawing</a:t>
-            </a:r>
-            <a:pPr algn="l" indent="0" marL="0">
-              <a:lnSpc>
-                <a:spcPts val="1680"/>
-              </a:lnSpc>
-              <a:spcBef>
-                <a:spcPts val="300"/>
-              </a:spcBef>
-              <a:spcAft>
-                <a:spcPts val="300"/>
-              </a:spcAft>
-              <a:buNone/>
-            </a:pPr>
-            <a:r>
-              <a:rPr lang="en-US" sz="1200" dirty="0">
-                <a:solidFill>
-                  <a:srgbClr val="2C2C2C"/>
-                </a:solidFill>
-                <a:latin typeface="Verdana" pitchFamily="34" charset="0"/>
-                <a:ea typeface="Verdana" pitchFamily="34" charset="-122"/>
-                <a:cs typeface="Verdana" pitchFamily="34" charset="-120"/>
-              </a:rPr>
-              <a:t> — a big picture of the element with one example from home - </a:t>
-            </a:r>
-            <a:pPr algn="l" indent="0" marL="0">
-              <a:lnSpc>
-                <a:spcPts val="1680"/>
-              </a:lnSpc>
-              <a:spcBef>
-                <a:spcPts val="300"/>
-              </a:spcBef>
-              <a:spcAft>
-                <a:spcPts val="300"/>
-              </a:spcAft>
-              <a:buNone/>
-            </a:pPr>
-            <a:r>
-              <a:rPr lang="en-US" sz="1200" b="1" dirty="0">
-                <a:solidFill>
-                  <a:srgbClr val="2C2C2C"/>
-                </a:solidFill>
-                <a:latin typeface="Verdana" pitchFamily="34" charset="0"/>
-                <a:ea typeface="Verdana" pitchFamily="34" charset="-122"/>
-                <a:cs typeface="Verdana" pitchFamily="34" charset="-120"/>
-              </a:rPr>
-              <a:t>3D model</a:t>
-            </a:r>
-            <a:pPr algn="l" indent="0" marL="0">
-              <a:lnSpc>
-                <a:spcPts val="1680"/>
-              </a:lnSpc>
-              <a:spcBef>
-                <a:spcPts val="300"/>
-              </a:spcBef>
-              <a:spcAft>
-                <a:spcPts val="300"/>
-              </a:spcAft>
-              <a:buNone/>
-            </a:pPr>
-            <a:r>
-              <a:rPr lang="en-US" sz="1200" dirty="0">
-                <a:solidFill>
-                  <a:srgbClr val="2C2C2C"/>
-                </a:solidFill>
-                <a:latin typeface="Verdana" pitchFamily="34" charset="0"/>
-                <a:ea typeface="Verdana" pitchFamily="34" charset="-122"/>
-                <a:cs typeface="Verdana" pitchFamily="34" charset="-120"/>
-              </a:rPr>
-              <a:t> — clay, recycled junk, etc. - </a:t>
-            </a:r>
-            <a:pPr algn="l" indent="0" marL="0">
-              <a:lnSpc>
-                <a:spcPts val="1680"/>
-              </a:lnSpc>
-              <a:spcBef>
-                <a:spcPts val="300"/>
-              </a:spcBef>
-              <a:spcAft>
-                <a:spcPts val="300"/>
-              </a:spcAft>
-              <a:buNone/>
-            </a:pPr>
-            <a:r>
-              <a:rPr lang="en-US" sz="1200" b="1" dirty="0">
-                <a:solidFill>
-                  <a:srgbClr val="2C2C2C"/>
-                </a:solidFill>
-                <a:latin typeface="Verdana" pitchFamily="34" charset="0"/>
-                <a:ea typeface="Verdana" pitchFamily="34" charset="-122"/>
-                <a:cs typeface="Verdana" pitchFamily="34" charset="-120"/>
-              </a:rPr>
-              <a:t>Story</a:t>
-            </a:r>
-            <a:pPr algn="l" indent="0" marL="0">
-              <a:lnSpc>
-                <a:spcPts val="1680"/>
-              </a:lnSpc>
-              <a:spcBef>
-                <a:spcPts val="300"/>
-              </a:spcBef>
-              <a:spcAft>
-                <a:spcPts val="300"/>
-              </a:spcAft>
-              <a:buNone/>
-            </a:pPr>
-            <a:r>
-              <a:rPr lang="en-US" sz="1200" dirty="0">
-                <a:solidFill>
-                  <a:srgbClr val="2C2C2C"/>
-                </a:solidFill>
-                <a:latin typeface="Verdana" pitchFamily="34" charset="0"/>
-                <a:ea typeface="Verdana" pitchFamily="34" charset="-122"/>
-                <a:cs typeface="Verdana" pitchFamily="34" charset="-120"/>
-              </a:rPr>
-              <a:t> — a 30-second spoken story about the element</a:t>
-            </a:r>
-            <a:endParaRPr lang="en-US" sz="1200" dirty="0"/>
-          </a:p>
-        </p:txBody>
-      </p:sp>
-      <p:sp>
-        <p:nvSpPr>
-          <p:cNvPr id="5" name="Text 3"/>
-          <p:cNvSpPr/>
-          <p:nvPr/>
-        </p:nvSpPr>
-        <p:spPr>
-          <a:xfrm>
-            <a:off x="406301" y="1586954"/>
-            <a:ext cx="8498026" cy="213271"/>
-          </a:xfrm>
-          <a:prstGeom prst="rect">
-            <a:avLst/>
-          </a:prstGeom>
-          <a:noFill/>
-          <a:ln/>
-        </p:spPr>
-        <p:txBody>
-          <a:bodyPr wrap="square" lIns="0" tIns="0" rIns="0" bIns="0" rtlCol="0" anchor="t"/>
-          <a:lstStyle/>
-          <a:p>
-            <a:pPr algn="l" indent="0" marL="0">
-              <a:lnSpc>
-                <a:spcPts val="1680"/>
-              </a:lnSpc>
-              <a:spcBef>
-                <a:spcPts val="300"/>
-              </a:spcBef>
-              <a:spcAft>
-                <a:spcPts val="300"/>
-              </a:spcAft>
-              <a:buNone/>
-            </a:pPr>
-            <a:r>
-              <a:rPr lang="en-US" sz="1200" dirty="0">
-                <a:solidFill>
-                  <a:srgbClr val="2C2C2C"/>
-                </a:solidFill>
-                <a:latin typeface="Verdana" pitchFamily="34" charset="0"/>
-                <a:ea typeface="Verdana" pitchFamily="34" charset="-122"/>
-                <a:cs typeface="Verdana" pitchFamily="34" charset="-120"/>
-              </a:rPr>
-              <a:t>– Quick check: every child has decided.</a:t>
-            </a:r>
-            <a:endParaRPr lang="en-US" sz="1200" dirty="0"/>
-          </a:p>
-        </p:txBody>
-      </p:sp>
-      <p:sp>
-        <p:nvSpPr>
-          <p:cNvPr id="6" name="Text 4"/>
           <p:cNvSpPr/>
           <p:nvPr/>
         </p:nvSpPr>
@@ -3282,7 +3399,7 @@
                 <a:ea typeface="Georgia" pitchFamily="34" charset="-122"/>
                 <a:cs typeface="Georgia" pitchFamily="34" charset="-120"/>
               </a:rPr>
-              <a:t>Project work (22 min)</a:t>
+              <a:t>Project choice (5 min)</a:t>
             </a:r>
             <a:endParaRPr lang="en-US" sz="1800" dirty="0"/>
           </a:p>
@@ -3296,8 +3413,8 @@
         </p:nvSpPr>
         <p:spPr>
           <a:xfrm>
-            <a:off x="406301" y="870942"/>
-            <a:ext cx="8498026" cy="426541"/>
+            <a:off x="634901" y="883593"/>
+            <a:ext cx="8102798" cy="1257002"/>
           </a:xfrm>
           <a:prstGeom prst="rect">
             <a:avLst/>
@@ -3309,17 +3426,15 @@
           <a:bodyPr wrap="square" lIns="0" tIns="0" rIns="0" bIns="0" rtlCol="0" anchor="t"/>
           <a:lstStyle/>
           <a:p>
-            <a:pPr algn="l" indent="0" marL="0">
-              <a:lnSpc>
-                <a:spcPts val="1680"/>
-              </a:lnSpc>
-              <a:spcBef>
-                <a:spcPts val="300"/>
-              </a:spcBef>
-              <a:spcAft>
-                <a:spcPts val="300"/>
-              </a:spcAft>
-              <a:buNone/>
+            <a:pPr algn="l" marL="342900" indent="-342900">
+              <a:lnSpc>
+                <a:spcPts val="1620"/>
+              </a:lnSpc>
+              <a:spcAft>
+                <a:spcPts val="300"/>
+              </a:spcAft>
+              <a:buSzPct val="100000"/>
+              <a:buChar char="•"/>
             </a:pPr>
             <a:r>
               <a:rPr lang="en-US" sz="1200" dirty="0">
@@ -3330,22 +3445,23 @@
                 <a:ea typeface="Verdana" pitchFamily="34" charset="-122"/>
                 <a:cs typeface="Verdana" pitchFamily="34" charset="-120"/>
               </a:rPr>
-              <a:t>– Children work individually or in twos at desks. – Teacher rotates: 30 seconds per child, asking ONE question: </a:t>
-            </a:r>
-            <a:pPr algn="l" indent="0" marL="0">
-              <a:lnSpc>
-                <a:spcPts val="1680"/>
-              </a:lnSpc>
-              <a:spcBef>
-                <a:spcPts val="300"/>
-              </a:spcBef>
-              <a:spcAft>
-                <a:spcPts val="300"/>
-              </a:spcAft>
-              <a:buNone/>
-            </a:pPr>
-            <a:r>
-              <a:rPr lang="en-US" sz="1200" i="1" dirty="0">
+              <a:t>Each child picks ONE element.</a:t>
+            </a:r>
+            <a:endParaRPr lang="en-US" sz="1200" dirty="0"/>
+          </a:p>
+          <a:p>
+            <a:pPr algn="l" marL="342900" indent="-342900">
+              <a:lnSpc>
+                <a:spcPts val="1620"/>
+              </a:lnSpc>
+              <a:spcAft>
+                <a:spcPts val="300"/>
+              </a:spcAft>
+              <a:buSzPct val="100000"/>
+              <a:buChar char="•"/>
+            </a:pPr>
+            <a:r>
+              <a:rPr lang="en-US" sz="1200" dirty="0">
                 <a:solidFill>
                   <a:srgbClr val="2C2C2C"/>
                 </a:solidFill>
@@ -3353,15 +3469,193 @@
                 <a:ea typeface="Verdana" pitchFamily="34" charset="-122"/>
                 <a:cs typeface="Verdana" pitchFamily="34" charset="-120"/>
               </a:rPr>
-              <a:t>"What part of this is your favourite?"</a:t>
+              <a:t>Each child picks ONE format:</a:t>
             </a:r>
             <a:endParaRPr lang="en-US" sz="1200" dirty="0"/>
           </a:p>
+          <a:p>
+            <a:pPr algn="l" marL="342900" indent="-342900">
+              <a:lnSpc>
+                <a:spcPts val="1620"/>
+              </a:lnSpc>
+              <a:spcAft>
+                <a:spcPts val="300"/>
+              </a:spcAft>
+              <a:buSzPct val="100000"/>
+              <a:buChar char="•"/>
+            </a:pPr>
+            <a:r>
+              <a:rPr lang="en-US" sz="1200" b="1" dirty="0">
+                <a:solidFill>
+                  <a:srgbClr val="2C2C2C"/>
+                </a:solidFill>
+                <a:latin typeface="Verdana" pitchFamily="34" charset="0"/>
+                <a:ea typeface="Verdana" pitchFamily="34" charset="-122"/>
+                <a:cs typeface="Verdana" pitchFamily="34" charset="-120"/>
+              </a:rPr>
+              <a:t>Drawing</a:t>
+            </a:r>
+            <a:pPr algn="l" indent="0" marL="0">
+              <a:lnSpc>
+                <a:spcPts val="1620"/>
+              </a:lnSpc>
+              <a:spcAft>
+                <a:spcPts val="300"/>
+              </a:spcAft>
+              <a:buNone/>
+            </a:pPr>
+            <a:r>
+              <a:rPr lang="en-US" sz="1200" dirty="0">
+                <a:solidFill>
+                  <a:srgbClr val="2C2C2C"/>
+                </a:solidFill>
+                <a:latin typeface="Verdana" pitchFamily="34" charset="0"/>
+                <a:ea typeface="Verdana" pitchFamily="34" charset="-122"/>
+                <a:cs typeface="Verdana" pitchFamily="34" charset="-120"/>
+              </a:rPr>
+              <a:t> — a big picture of the element with one example from home</a:t>
+            </a:r>
+            <a:endParaRPr lang="en-US" sz="1200" dirty="0"/>
+          </a:p>
+          <a:p>
+            <a:pPr algn="l" marL="342900" indent="-342900">
+              <a:lnSpc>
+                <a:spcPts val="1620"/>
+              </a:lnSpc>
+              <a:spcAft>
+                <a:spcPts val="300"/>
+              </a:spcAft>
+              <a:buSzPct val="100000"/>
+              <a:buChar char="•"/>
+            </a:pPr>
+            <a:r>
+              <a:rPr lang="en-US" sz="1200" b="1" dirty="0">
+                <a:solidFill>
+                  <a:srgbClr val="2C2C2C"/>
+                </a:solidFill>
+                <a:latin typeface="Verdana" pitchFamily="34" charset="0"/>
+                <a:ea typeface="Verdana" pitchFamily="34" charset="-122"/>
+                <a:cs typeface="Verdana" pitchFamily="34" charset="-120"/>
+              </a:rPr>
+              <a:t>3D model</a:t>
+            </a:r>
+            <a:pPr algn="l" indent="0" marL="0">
+              <a:lnSpc>
+                <a:spcPts val="1620"/>
+              </a:lnSpc>
+              <a:spcAft>
+                <a:spcPts val="300"/>
+              </a:spcAft>
+              <a:buNone/>
+            </a:pPr>
+            <a:r>
+              <a:rPr lang="en-US" sz="1200" dirty="0">
+                <a:solidFill>
+                  <a:srgbClr val="2C2C2C"/>
+                </a:solidFill>
+                <a:latin typeface="Verdana" pitchFamily="34" charset="0"/>
+                <a:ea typeface="Verdana" pitchFamily="34" charset="-122"/>
+                <a:cs typeface="Verdana" pitchFamily="34" charset="-120"/>
+              </a:rPr>
+              <a:t> — clay, recycled junk, etc.</a:t>
+            </a:r>
+            <a:endParaRPr lang="en-US" sz="1200" dirty="0"/>
+          </a:p>
+          <a:p>
+            <a:pPr algn="l" marL="342900" indent="-342900">
+              <a:lnSpc>
+                <a:spcPts val="1620"/>
+              </a:lnSpc>
+              <a:spcAft>
+                <a:spcPts val="300"/>
+              </a:spcAft>
+              <a:buSzPct val="100000"/>
+              <a:buChar char="•"/>
+            </a:pPr>
+            <a:r>
+              <a:rPr lang="en-US" sz="1200" b="1" dirty="0">
+                <a:solidFill>
+                  <a:srgbClr val="2C2C2C"/>
+                </a:solidFill>
+                <a:latin typeface="Verdana" pitchFamily="34" charset="0"/>
+                <a:ea typeface="Verdana" pitchFamily="34" charset="-122"/>
+                <a:cs typeface="Verdana" pitchFamily="34" charset="-120"/>
+              </a:rPr>
+              <a:t>Story</a:t>
+            </a:r>
+            <a:pPr algn="l" indent="0" marL="0">
+              <a:lnSpc>
+                <a:spcPts val="1620"/>
+              </a:lnSpc>
+              <a:spcAft>
+                <a:spcPts val="300"/>
+              </a:spcAft>
+              <a:buNone/>
+            </a:pPr>
+            <a:r>
+              <a:rPr lang="en-US" sz="1200" dirty="0">
+                <a:solidFill>
+                  <a:srgbClr val="2C2C2C"/>
+                </a:solidFill>
+                <a:latin typeface="Verdana" pitchFamily="34" charset="0"/>
+                <a:ea typeface="Verdana" pitchFamily="34" charset="-122"/>
+                <a:cs typeface="Verdana" pitchFamily="34" charset="-120"/>
+              </a:rPr>
+              <a:t> — a 30-second spoken story about the element</a:t>
+            </a:r>
+            <a:endParaRPr lang="en-US" sz="1200" dirty="0"/>
+          </a:p>
         </p:txBody>
       </p:sp>
       <p:sp>
         <p:nvSpPr>
           <p:cNvPr id="5" name="Text 3"/>
+          <p:cNvSpPr/>
+          <p:nvPr/>
+        </p:nvSpPr>
+        <p:spPr>
+          <a:xfrm>
+            <a:off x="634901" y="2242096"/>
+            <a:ext cx="8102798" cy="281880"/>
+          </a:xfrm>
+          <a:prstGeom prst="rect">
+            <a:avLst/>
+          </a:prstGeom>
+          <a:noFill/>
+          <a:ln/>
+        </p:spPr>
+        <p:txBody>
+          <a:bodyPr wrap="square" lIns="0" tIns="0" rIns="0" bIns="0" rtlCol="0" anchor="t"/>
+          <a:lstStyle/>
+          <a:p>
+            <a:pPr algn="l" marL="342900" indent="-342900">
+              <a:lnSpc>
+                <a:spcPts val="1620"/>
+              </a:lnSpc>
+              <a:spcAft>
+                <a:spcPts val="300"/>
+              </a:spcAft>
+              <a:buSzPct val="100000"/>
+              <a:buChar char="•"/>
+            </a:pPr>
+            <a:r>
+              <a:rPr lang="en-US" sz="1200" dirty="0">
+                <a:solidFill>
+                  <a:srgbClr val="2C2C2C"/>
+                </a:solidFill>
+                <a:latin typeface="Verdana" pitchFamily="34" charset="0"/>
+                <a:ea typeface="Verdana" pitchFamily="34" charset="-122"/>
+                <a:cs typeface="Verdana" pitchFamily="34" charset="-120"/>
+              </a:rPr>
+              <a:t>Quick check: every child has decided.</a:t>
+            </a:r>
+            <a:endParaRPr lang="en-US" sz="1200" dirty="0"/>
+          </a:p>
+        </p:txBody>
+      </p:sp>
+      <p:sp>
+        <p:nvSpPr>
+          <p:cNvPr id="6" name="Text 4"/>
           <p:cNvSpPr/>
           <p:nvPr/>
         </p:nvSpPr>
@@ -3511,7 +3805,7 @@
                 <a:ea typeface="Georgia" pitchFamily="34" charset="-122"/>
                 <a:cs typeface="Georgia" pitchFamily="34" charset="-120"/>
               </a:rPr>
-              <a:t>Show + chant (3 min)</a:t>
+              <a:t>Project work (22 min)</a:t>
             </a:r>
             <a:endParaRPr lang="en-US" sz="1800" dirty="0"/>
           </a:p>
@@ -3525,8 +3819,8 @@
         </p:nvSpPr>
         <p:spPr>
           <a:xfrm>
-            <a:off x="406301" y="870942"/>
-            <a:ext cx="8498026" cy="213271"/>
+            <a:off x="634901" y="883593"/>
+            <a:ext cx="8102798" cy="525661"/>
           </a:xfrm>
           <a:prstGeom prst="rect">
             <a:avLst/>
@@ -3538,17 +3832,15 @@
           <a:bodyPr wrap="square" lIns="0" tIns="0" rIns="0" bIns="0" rtlCol="0" anchor="t"/>
           <a:lstStyle/>
           <a:p>
-            <a:pPr algn="l" indent="0" marL="0">
-              <a:lnSpc>
-                <a:spcPts val="1680"/>
-              </a:lnSpc>
-              <a:spcBef>
-                <a:spcPts val="300"/>
-              </a:spcBef>
-              <a:spcAft>
-                <a:spcPts val="300"/>
-              </a:spcAft>
-              <a:buNone/>
+            <a:pPr algn="l" marL="342900" indent="-342900">
+              <a:lnSpc>
+                <a:spcPts val="1620"/>
+              </a:lnSpc>
+              <a:spcAft>
+                <a:spcPts val="300"/>
+              </a:spcAft>
+              <a:buSzPct val="100000"/>
+              <a:buChar char="•"/>
             </a:pPr>
             <a:r>
               <a:rPr lang="en-US" sz="1200" dirty="0">
@@ -3559,7 +3851,51 @@
                 <a:ea typeface="Verdana" pitchFamily="34" charset="-122"/>
                 <a:cs typeface="Verdana" pitchFamily="34" charset="-120"/>
               </a:rPr>
-              <a:t>2 children share progress. Close with the song.</a:t>
+              <a:t>Children work individually or in twos at desks.</a:t>
+            </a:r>
+            <a:endParaRPr lang="en-US" sz="1200" dirty="0"/>
+          </a:p>
+          <a:p>
+            <a:pPr algn="l" marL="342900" indent="-342900">
+              <a:lnSpc>
+                <a:spcPts val="1620"/>
+              </a:lnSpc>
+              <a:spcAft>
+                <a:spcPts val="300"/>
+              </a:spcAft>
+              <a:buSzPct val="100000"/>
+              <a:buChar char="•"/>
+            </a:pPr>
+            <a:r>
+              <a:rPr lang="en-US" sz="1200" dirty="0">
+                <a:solidFill>
+                  <a:srgbClr val="2C2C2C"/>
+                </a:solidFill>
+                <a:latin typeface="Verdana" pitchFamily="34" charset="0"/>
+                <a:ea typeface="Verdana" pitchFamily="34" charset="-122"/>
+                <a:cs typeface="Verdana" pitchFamily="34" charset="-120"/>
+              </a:rPr>
+              <a:t>Teacher rotates: 30 seconds per child, asking ONE question: </a:t>
+            </a:r>
+            <a:pPr algn="l" indent="0" marL="0">
+              <a:lnSpc>
+                <a:spcPts val="1620"/>
+              </a:lnSpc>
+              <a:spcAft>
+                <a:spcPts val="300"/>
+              </a:spcAft>
+              <a:buNone/>
+            </a:pPr>
+            <a:r>
+              <a:rPr lang="en-US" sz="1200" i="1" dirty="0">
+                <a:solidFill>
+                  <a:srgbClr val="2C2C2C"/>
+                </a:solidFill>
+                <a:latin typeface="Verdana" pitchFamily="34" charset="0"/>
+                <a:ea typeface="Verdana" pitchFamily="34" charset="-122"/>
+                <a:cs typeface="Verdana" pitchFamily="34" charset="-120"/>
+              </a:rPr>
+              <a:t>"What part of this is your favourite?"</a:t>
             </a:r>
             <a:endParaRPr lang="en-US" sz="1200" dirty="0"/>
           </a:p>
@@ -3717,7 +4053,7 @@
                 <a:ea typeface="Georgia" pitchFamily="34" charset="-122"/>
                 <a:cs typeface="Georgia" pitchFamily="34" charset="-120"/>
               </a:rPr>
-              <a:t>Homework</a:t>
+              <a:t>Show + chant (3 min)</a:t>
             </a:r>
             <a:endParaRPr lang="en-US" sz="1800" dirty="0"/>
           </a:p>
@@ -3765,7 +4101,7 @@
                 <a:ea typeface="Verdana" pitchFamily="34" charset="-122"/>
                 <a:cs typeface="Verdana" pitchFamily="34" charset="-120"/>
               </a:rPr>
-              <a:t>– Finish any drawing/model at home if you didn't finish in class. Story-tellers practise your story 3 times.</a:t>
+              <a:t>2 children share progress. Close with the song.</a:t>
             </a:r>
             <a:endParaRPr lang="en-US" sz="1200" dirty="0"/>
           </a:p>
@@ -3923,7 +4259,7 @@
                 <a:ea typeface="Georgia" pitchFamily="34" charset="-122"/>
                 <a:cs typeface="Georgia" pitchFamily="34" charset="-120"/>
               </a:rPr>
-              <a:t>Differentiation</a:t>
+              <a:t>Homework</a:t>
             </a:r>
             <a:endParaRPr lang="en-US" sz="1800" dirty="0"/>
           </a:p>
@@ -3938,7 +4274,7 @@
         <p:spPr>
           <a:xfrm>
             <a:off x="634901" y="883593"/>
-            <a:ext cx="8102798" cy="525661"/>
+            <a:ext cx="8102798" cy="281880"/>
           </a:xfrm>
           <a:prstGeom prst="rect">
             <a:avLst/>
@@ -3961,7 +4297,7 @@
               <a:buChar char="•"/>
             </a:pPr>
             <a:r>
-              <a:rPr lang="en-US" sz="1200" b="1" dirty="0">
+              <a:rPr lang="en-US" sz="1200" dirty="0">
                 <a:solidFill>
                   <a:srgbClr val="2C2C2C"/>
                 </a:solidFill>
@@ -3969,71 +4305,7 @@
                 <a:ea typeface="Verdana" pitchFamily="34" charset="-122"/>
                 <a:cs typeface="Verdana" pitchFamily="34" charset="-120"/>
               </a:rPr>
-              <a:t>Tier up:</a:t>
-            </a:r>
-            <a:pPr algn="l" indent="0" marL="0">
-              <a:lnSpc>
-                <a:spcPts val="1620"/>
-              </a:lnSpc>
-              <a:spcAft>
-                <a:spcPts val="300"/>
-              </a:spcAft>
-              <a:buNone/>
-            </a:pPr>
-            <a:r>
-              <a:rPr lang="en-US" sz="1200" dirty="0">
-                <a:solidFill>
-                  <a:srgbClr val="2C2C2C"/>
-                </a:solidFill>
-                <a:latin typeface="Verdana" pitchFamily="34" charset="0"/>
-                <a:ea typeface="Verdana" pitchFamily="34" charset="-122"/>
-                <a:cs typeface="Verdana" pitchFamily="34" charset="-120"/>
-              </a:rPr>
-              <a:t> Show two elements interacting (rain falling on soil = Ap + Pṛthvī).</a:t>
-            </a:r>
-            <a:endParaRPr lang="en-US" sz="1200" dirty="0"/>
-          </a:p>
-          <a:p>
-            <a:pPr algn="l" marL="342900" indent="-342900">
-              <a:lnSpc>
-                <a:spcPts val="1620"/>
-              </a:lnSpc>
-              <a:spcAft>
-                <a:spcPts val="300"/>
-              </a:spcAft>
-              <a:buSzPct val="100000"/>
-              <a:buChar char="•"/>
-            </a:pPr>
-            <a:r>
-              <a:rPr lang="en-US" sz="1200" b="1" dirty="0">
-                <a:solidFill>
-                  <a:srgbClr val="2C2C2C"/>
-                </a:solidFill>
-                <a:latin typeface="Verdana" pitchFamily="34" charset="0"/>
-                <a:ea typeface="Verdana" pitchFamily="34" charset="-122"/>
-                <a:cs typeface="Verdana" pitchFamily="34" charset="-120"/>
-              </a:rPr>
-              <a:t>Tier down:</a:t>
-            </a:r>
-            <a:pPr algn="l" indent="0" marL="0">
-              <a:lnSpc>
-                <a:spcPts val="1620"/>
-              </a:lnSpc>
-              <a:spcAft>
-                <a:spcPts val="300"/>
-              </a:spcAft>
-              <a:buNone/>
-            </a:pPr>
-            <a:r>
-              <a:rPr lang="en-US" sz="1200" dirty="0">
-                <a:solidFill>
-                  <a:srgbClr val="2C2C2C"/>
-                </a:solidFill>
-                <a:latin typeface="Verdana" pitchFamily="34" charset="0"/>
-                <a:ea typeface="Verdana" pitchFamily="34" charset="-122"/>
-                <a:cs typeface="Verdana" pitchFamily="34" charset="-120"/>
-              </a:rPr>
-              <a:t> Drawing is the easiest format. Just pick one element and one picture.</a:t>
+              <a:t>Finish any drawing/model at home if you didn't finish in class. Story-tellers practise your story 3 times.</a:t>
             </a:r>
             <a:endParaRPr lang="en-US" sz="1200" dirty="0"/>
           </a:p>
